--- a/classes/parte-0-fundamentos-y-prerrequisitos/013-http-https-y-la-arquitectura-de-la-web-moderna/clase-013-presentacion.pptx
+++ b/classes/parte-0-fundamentos-y-prerrequisitos/013-http-https-y-la-arquitectura-de-la-web-moderna/clase-013-presentacion.pptx
@@ -17,6 +17,9 @@
     <p:sldId id="265" r:id="rId16"/>
     <p:sldId id="266" r:id="rId17"/>
     <p:sldId id="267" r:id="rId18"/>
+    <p:sldId id="268" r:id="rId19"/>
+    <p:sldId id="269" r:id="rId20"/>
+    <p:sldId id="270" r:id="rId21"/>
   </p:sldIdLst>
   <p:sldSz cx="9144000" cy="6858000" type="screen4x3"/>
   <p:notesSz cx="6858000" cy="9144000"/>
@@ -3198,7 +3201,7 @@
                   <a:srgbClr val="0B3D2E"/>
                 </a:solidFill>
               </a:rPr>
-              <a:t>⚠️ Errores comunes</a:t>
+              <a:t>✍️ Ejercicios</a:t>
             </a:r>
           </a:p>
         </p:txBody>
@@ -3236,67 +3239,97 @@
                   <a:srgbClr val="22282E"/>
                 </a:solidFill>
               </a:rPr>
-              <a:t>•  Burp no intercepta HTTPS — Falta instalar el certificado CA de Burp en el navegador. Impórtalo.</a:t>
-            </a:r>
-          </a:p>
-          <a:p>
-            <a:pPr>
-              <a:spcAft>
-                <a:spcPts val="600"/>
-              </a:spcAft>
-            </a:pPr>
-            <a:r>
-              <a:rPr sz="1500">
-                <a:solidFill>
-                  <a:srgbClr val="22282E"/>
-                </a:solidFill>
-              </a:rPr>
-              <a:t>•  curl da error de certificado — Certificado autofirmado en el lab. Usa -k solo en laboratorio, nunca en producción.</a:t>
-            </a:r>
-          </a:p>
-          <a:p>
-            <a:pPr>
-              <a:spcAft>
-                <a:spcPts val="600"/>
-              </a:spcAft>
-            </a:pPr>
-            <a:r>
-              <a:rPr sz="1500">
-                <a:solidFill>
-                  <a:srgbClr val="22282E"/>
-                </a:solidFill>
-              </a:rPr>
-              <a:t>•  La cookie no se envía en peticiones — Atributo SameSite/Secure o dominio/ruta incorrectos. Revisa el scope.</a:t>
-            </a:r>
-          </a:p>
-          <a:p>
-            <a:pPr>
-              <a:spcAft>
-                <a:spcPts val="600"/>
-              </a:spcAft>
-            </a:pPr>
-            <a:r>
-              <a:rPr sz="1500">
-                <a:solidFill>
-                  <a:srgbClr val="22282E"/>
-                </a:solidFill>
-              </a:rPr>
-              <a:t>•  405 Method Not Allowed — El recurso no admite ese método. Comprueba la API.</a:t>
-            </a:r>
-          </a:p>
-          <a:p>
-            <a:pPr>
-              <a:spcAft>
-                <a:spcPts val="600"/>
-              </a:spcAft>
-            </a:pPr>
-            <a:r>
-              <a:rPr sz="1500">
-                <a:solidFill>
-                  <a:srgbClr val="22282E"/>
-                </a:solidFill>
-              </a:rPr>
-              <a:t>•  HTTP/2 no aparece en la captura — Negociado por ALPN dentro de TLS. Usa herramientas que lo soporten.</a:t>
+              <a:t>•  Clasifica estos códigos e indica qué significa cada uno: 204, 301, 401, 403, 429, 502.</a:t>
+            </a:r>
+          </a:p>
+          <a:p>
+            <a:pPr>
+              <a:spcAft>
+                <a:spcPts val="600"/>
+              </a:spcAft>
+            </a:pPr>
+            <a:r>
+              <a:rPr sz="1500">
+                <a:solidFill>
+                  <a:srgbClr val="22282E"/>
+                </a:solidFill>
+              </a:rPr>
+              <a:t>•  Explica con un ejemplo la diferencia práctica entre 401 y 403 en una API.</a:t>
+            </a:r>
+          </a:p>
+          <a:p>
+            <a:pPr>
+              <a:spcAft>
+                <a:spcPts val="600"/>
+              </a:spcAft>
+            </a:pPr>
+            <a:r>
+              <a:rPr sz="1500">
+                <a:solidFill>
+                  <a:srgbClr val="22282E"/>
+                </a:solidFill>
+              </a:rPr>
+              <a:t>•  ¿Qué atributos hacen segura una cookie de sesión y contra qué ataque protege cada uno?</a:t>
+            </a:r>
+          </a:p>
+          <a:p>
+            <a:pPr>
+              <a:spcAft>
+                <a:spcPts val="600"/>
+              </a:spcAft>
+            </a:pPr>
+            <a:r>
+              <a:rPr sz="1500">
+                <a:solidFill>
+                  <a:srgbClr val="22282E"/>
+                </a:solidFill>
+              </a:rPr>
+              <a:t>•  Describe qué información revela y qué oculta TLS a un observador de la red.</a:t>
+            </a:r>
+          </a:p>
+          <a:p>
+            <a:pPr>
+              <a:spcAft>
+                <a:spcPts val="600"/>
+              </a:spcAft>
+            </a:pPr>
+            <a:r>
+              <a:rPr sz="1500">
+                <a:solidFill>
+                  <a:srgbClr val="22282E"/>
+                </a:solidFill>
+              </a:rPr>
+              <a:t>•  Investiga la cabecera Content-Security-Policy y escribe un ejemplo que mitigue XSS.</a:t>
+            </a:r>
+          </a:p>
+          <a:p>
+            <a:pPr>
+              <a:spcAft>
+                <a:spcPts val="600"/>
+              </a:spcAft>
+            </a:pPr>
+            <a:r>
+              <a:rPr sz="1500">
+                <a:solidFill>
+                  <a:srgbClr val="22282E"/>
+                </a:solidFill>
+              </a:rPr>
+              <a:t>•  Con Burp o ZAP Repeater, cambia un parámetro de una petición y documenta cómo responde la app.</a:t>
+            </a:r>
+          </a:p>
+          <a:p>
+            <a:pPr>
+              <a:spcAft>
+                <a:spcPts val="600"/>
+              </a:spcAft>
+            </a:pPr>
+            <a:r>
+              <a:rPr sz="1500">
+                <a:solidFill>
+                  <a:srgbClr val="22282E"/>
+                </a:solidFill>
+              </a:rPr>
+              <a:t>•  Explica por qué HTTPS es necesario pero no suficiente para la seguridad de una aplicación.</a:t>
             </a:r>
           </a:p>
         </p:txBody>
@@ -3347,7 +3380,7 @@
                   <a:srgbClr val="0B3D2E"/>
                 </a:solidFill>
               </a:rPr>
-              <a:t>❓ Preguntas frecuentes</a:t>
+              <a:t>📝 Reto verificable</a:t>
             </a:r>
           </a:p>
         </p:txBody>
@@ -3385,52 +3418,22 @@
                   <a:srgbClr val="22282E"/>
                 </a:solidFill>
               </a:rPr>
-              <a:t>•  ❓ ¿HTTPS hace segura mi aplicación? No: cifra el canal, pero no protege contra fallos de la app (inyección, XSS, lógica). Es necesario pero no suficiente.</a:t>
-            </a:r>
-          </a:p>
-          <a:p>
-            <a:pPr>
-              <a:spcAft>
-                <a:spcPts val="600"/>
-              </a:spcAft>
-            </a:pPr>
-            <a:r>
-              <a:rPr sz="1500">
-                <a:solidFill>
-                  <a:srgbClr val="22282E"/>
-                </a:solidFill>
-              </a:rPr>
-              <a:t>•  ❓ ¿Por qué HTTP es "sin estado" si hay sesiones? El protocolo no recuerda peticiones anteriores; las cookies y tokens simulan estado guardándolo en cliente/servidor.</a:t>
-            </a:r>
-          </a:p>
-          <a:p>
-            <a:pPr>
-              <a:spcAft>
-                <a:spcPts val="600"/>
-              </a:spcAft>
-            </a:pPr>
-            <a:r>
-              <a:rPr sz="1500">
-                <a:solidFill>
-                  <a:srgbClr val="22282E"/>
-                </a:solidFill>
-              </a:rPr>
-              <a:t>•  ❓ ¿Qué cambia HTTP/2 y HTTP/3? HTTP/2 multiplexa varias peticiones en una conexión; HTTP/3 corre sobre QUIC (UDP) reduciendo latencia. La semántica (métodos, estados) se mantiene.</a:t>
-            </a:r>
-          </a:p>
-          <a:p>
-            <a:pPr>
-              <a:spcAft>
-                <a:spcPts val="600"/>
-              </a:spcAft>
-            </a:pPr>
-            <a:r>
-              <a:rPr sz="1500">
-                <a:solidFill>
-                  <a:srgbClr val="22282E"/>
-                </a:solidFill>
-              </a:rPr>
-              <a:t>•  ❓ ¿Burp o ZAP? Ambos interceptan y modifican tráfico. Burp es el estándar profesional; ZAP es open source y gratuito. Para aprender, cualquiera sirve.</a:t>
+              <a:t>•  Usando un proxy de interceptación, captura el flujo completo de autenticación de una app de laboratorio: la petición de login, la respuesta que establece la cookie de sesión y una petición…</a:t>
+            </a:r>
+          </a:p>
+          <a:p>
+            <a:pPr>
+              <a:spcAft>
+                <a:spcPts val="600"/>
+              </a:spcAft>
+            </a:pPr>
+            <a:r>
+              <a:rPr sz="1500">
+                <a:solidFill>
+                  <a:srgbClr val="22282E"/>
+                </a:solidFill>
+              </a:rPr>
+              <a:t>•  Criterio de aceptación: la evidencia muestra la cookie de sesión con sus atributos reales, e identificas correctamente al menos dos cabeceras de seguridad faltantes (por ejemplo HSTS, CSP o SameSite)…</a:t>
             </a:r>
           </a:p>
         </p:txBody>
@@ -3481,7 +3484,7 @@
                   <a:srgbClr val="0B3D2E"/>
                 </a:solidFill>
               </a:rPr>
-              <a:t>🔗 Referencias</a:t>
+              <a:t>⚠️ Errores comunes</a:t>
             </a:r>
           </a:p>
         </p:txBody>
@@ -3519,6 +3522,304 @@
                   <a:srgbClr val="22282E"/>
                 </a:solidFill>
               </a:rPr>
+              <a:t>•  Burp no intercepta HTTPS — Falta instalar el certificado CA de Burp en el navegador. Impórtalo y confía en él.</a:t>
+            </a:r>
+          </a:p>
+          <a:p>
+            <a:pPr>
+              <a:spcAft>
+                <a:spcPts val="600"/>
+              </a:spcAft>
+            </a:pPr>
+            <a:r>
+              <a:rPr sz="1500">
+                <a:solidFill>
+                  <a:srgbClr val="22282E"/>
+                </a:solidFill>
+              </a:rPr>
+              <a:t>•  curl da error de certificado — Certificado autofirmado en el laboratorio. Usa -k solo en laboratorio, nunca en producción.</a:t>
+            </a:r>
+          </a:p>
+          <a:p>
+            <a:pPr>
+              <a:spcAft>
+                <a:spcPts val="600"/>
+              </a:spcAft>
+            </a:pPr>
+            <a:r>
+              <a:rPr sz="1500">
+                <a:solidFill>
+                  <a:srgbClr val="22282E"/>
+                </a:solidFill>
+              </a:rPr>
+              <a:t>•  La cookie no se envía en las peticiones — Atributo SameSite/Secure o dominio/ruta incorrectos. Revisa el scope de la cookie.</a:t>
+            </a:r>
+          </a:p>
+          <a:p>
+            <a:pPr>
+              <a:spcAft>
+                <a:spcPts val="600"/>
+              </a:spcAft>
+            </a:pPr>
+            <a:r>
+              <a:rPr sz="1500">
+                <a:solidFill>
+                  <a:srgbClr val="22282E"/>
+                </a:solidFill>
+              </a:rPr>
+              <a:t>•  405 Method Not Allowed — El recurso no admite ese método. Comprueba la definición de la API.</a:t>
+            </a:r>
+          </a:p>
+          <a:p>
+            <a:pPr>
+              <a:spcAft>
+                <a:spcPts val="600"/>
+              </a:spcAft>
+            </a:pPr>
+            <a:r>
+              <a:rPr sz="1500">
+                <a:solidFill>
+                  <a:srgbClr val="22282E"/>
+                </a:solidFill>
+              </a:rPr>
+              <a:t>•  HTTP/2 no aparece en la captura — Se negocia por ALPN dentro de TLS. Usa herramientas que soporten HTTP/2.</a:t>
+            </a:r>
+          </a:p>
+          <a:p>
+            <a:pPr>
+              <a:spcAft>
+                <a:spcPts val="600"/>
+              </a:spcAft>
+            </a:pPr>
+            <a:r>
+              <a:rPr sz="1500">
+                <a:solidFill>
+                  <a:srgbClr val="22282E"/>
+                </a:solidFill>
+              </a:rPr>
+              <a:t>•  El login funciona pero se pierde la sesión — La cookie no se guarda o se bloquea por SameSite. Revisa dominio, ruta y atributos.</a:t>
+            </a:r>
+          </a:p>
+        </p:txBody>
+      </p:sp>
+    </p:spTree>
+  </p:cSld>
+  <p:clrMapOvr>
+    <a:masterClrMapping/>
+  </p:clrMapOvr>
+</p:sld>
+</file>
+
+<file path=ppt/slides/slide13.xml><?xml version="1.0" encoding="utf-8"?>
+<p:sld xmlns:a="http://schemas.openxmlformats.org/drawingml/2006/main" xmlns:p="http://schemas.openxmlformats.org/presentationml/2006/main" xmlns:r="http://schemas.openxmlformats.org/officeDocument/2006/relationships">
+  <p:cSld>
+    <p:spTree>
+      <p:nvGrpSpPr>
+        <p:cNvPr id="1" name=""/>
+        <p:cNvGrpSpPr/>
+        <p:nvPr/>
+      </p:nvGrpSpPr>
+      <p:grpSpPr/>
+      <p:sp>
+        <p:nvSpPr>
+          <p:cNvPr id="2" name="TextBox 1"/>
+          <p:cNvSpPr txBox="1"/>
+          <p:nvPr/>
+        </p:nvSpPr>
+        <p:spPr>
+          <a:xfrm>
+            <a:off x="457200" y="320040"/>
+            <a:ext cx="8229600" cy="822960"/>
+          </a:xfrm>
+          <a:prstGeom prst="rect">
+            <a:avLst/>
+          </a:prstGeom>
+          <a:noFill/>
+        </p:spPr>
+        <p:txBody>
+          <a:bodyPr wrap="square">
+            <a:spAutoFit/>
+          </a:bodyPr>
+          <a:lstStyle/>
+          <a:p>
+            <a:r>
+              <a:rPr sz="2600" b="1">
+                <a:solidFill>
+                  <a:srgbClr val="0B3D2E"/>
+                </a:solidFill>
+              </a:rPr>
+              <a:t>❓ Preguntas frecuentes</a:t>
+            </a:r>
+          </a:p>
+        </p:txBody>
+      </p:sp>
+      <p:sp>
+        <p:nvSpPr>
+          <p:cNvPr id="3" name="TextBox 2"/>
+          <p:cNvSpPr txBox="1"/>
+          <p:nvPr/>
+        </p:nvSpPr>
+        <p:spPr>
+          <a:xfrm>
+            <a:off x="457200" y="1280160"/>
+            <a:ext cx="8229600" cy="4937760"/>
+          </a:xfrm>
+          <a:prstGeom prst="rect">
+            <a:avLst/>
+          </a:prstGeom>
+          <a:noFill/>
+        </p:spPr>
+        <p:txBody>
+          <a:bodyPr wrap="square">
+            <a:spAutoFit/>
+          </a:bodyPr>
+          <a:lstStyle/>
+          <a:p>
+            <a:pPr>
+              <a:spcAft>
+                <a:spcPts val="600"/>
+              </a:spcAft>
+            </a:pPr>
+            <a:r>
+              <a:rPr sz="1500">
+                <a:solidFill>
+                  <a:srgbClr val="22282E"/>
+                </a:solidFill>
+              </a:rPr>
+              <a:t>•  ❓ ¿HTTPS hace segura mi aplicación? No: cifra y autentica el canal, pero no protege contra fallos de la aplicación (inyección, XSS, lógica de negocio). Es necesario pero no suficiente.</a:t>
+            </a:r>
+          </a:p>
+          <a:p>
+            <a:pPr>
+              <a:spcAft>
+                <a:spcPts val="600"/>
+              </a:spcAft>
+            </a:pPr>
+            <a:r>
+              <a:rPr sz="1500">
+                <a:solidFill>
+                  <a:srgbClr val="22282E"/>
+                </a:solidFill>
+              </a:rPr>
+              <a:t>•  ❓ ¿Por qué HTTP es "sin estado" si existen las sesiones? El protocolo no recuerda peticiones anteriores; las cookies y los tokens simulan estado guardándolo en el cliente o en el servidor y…</a:t>
+            </a:r>
+          </a:p>
+          <a:p>
+            <a:pPr>
+              <a:spcAft>
+                <a:spcPts val="600"/>
+              </a:spcAft>
+            </a:pPr>
+            <a:r>
+              <a:rPr sz="1500">
+                <a:solidFill>
+                  <a:srgbClr val="22282E"/>
+                </a:solidFill>
+              </a:rPr>
+              <a:t>•  ❓ ¿Qué cambia con HTTP/2 y HTTP/3? HTTP/2 multiplexa varias peticiones en una conexión TCP; HTTP/3 corre sobre QUIC (UDP) reduciendo latencia y resistiendo cambios de red. La semántica (métodos…</a:t>
+            </a:r>
+          </a:p>
+          <a:p>
+            <a:pPr>
+              <a:spcAft>
+                <a:spcPts val="600"/>
+              </a:spcAft>
+            </a:pPr>
+            <a:r>
+              <a:rPr sz="1500">
+                <a:solidFill>
+                  <a:srgbClr val="22282E"/>
+                </a:solidFill>
+              </a:rPr>
+              <a:t>•  ❓ ¿Burp o ZAP? Ambos interceptan y modifican tráfico. Burp es el estándar profesional con una edición Community limitada; ZAP es open source y completamente gratuito. Para aprender, cualquiera de los…</a:t>
+            </a:r>
+          </a:p>
+        </p:txBody>
+      </p:sp>
+    </p:spTree>
+  </p:cSld>
+  <p:clrMapOvr>
+    <a:masterClrMapping/>
+  </p:clrMapOvr>
+</p:sld>
+</file>
+
+<file path=ppt/slides/slide14.xml><?xml version="1.0" encoding="utf-8"?>
+<p:sld xmlns:a="http://schemas.openxmlformats.org/drawingml/2006/main" xmlns:p="http://schemas.openxmlformats.org/presentationml/2006/main" xmlns:r="http://schemas.openxmlformats.org/officeDocument/2006/relationships">
+  <p:cSld>
+    <p:spTree>
+      <p:nvGrpSpPr>
+        <p:cNvPr id="1" name=""/>
+        <p:cNvGrpSpPr/>
+        <p:nvPr/>
+      </p:nvGrpSpPr>
+      <p:grpSpPr/>
+      <p:sp>
+        <p:nvSpPr>
+          <p:cNvPr id="2" name="TextBox 1"/>
+          <p:cNvSpPr txBox="1"/>
+          <p:nvPr/>
+        </p:nvSpPr>
+        <p:spPr>
+          <a:xfrm>
+            <a:off x="457200" y="320040"/>
+            <a:ext cx="8229600" cy="822960"/>
+          </a:xfrm>
+          <a:prstGeom prst="rect">
+            <a:avLst/>
+          </a:prstGeom>
+          <a:noFill/>
+        </p:spPr>
+        <p:txBody>
+          <a:bodyPr wrap="square">
+            <a:spAutoFit/>
+          </a:bodyPr>
+          <a:lstStyle/>
+          <a:p>
+            <a:r>
+              <a:rPr sz="2600" b="1">
+                <a:solidFill>
+                  <a:srgbClr val="0B3D2E"/>
+                </a:solidFill>
+              </a:rPr>
+              <a:t>🔗 Referencias</a:t>
+            </a:r>
+          </a:p>
+        </p:txBody>
+      </p:sp>
+      <p:sp>
+        <p:nvSpPr>
+          <p:cNvPr id="3" name="TextBox 2"/>
+          <p:cNvSpPr txBox="1"/>
+          <p:nvPr/>
+        </p:nvSpPr>
+        <p:spPr>
+          <a:xfrm>
+            <a:off x="457200" y="1280160"/>
+            <a:ext cx="8229600" cy="4937760"/>
+          </a:xfrm>
+          <a:prstGeom prst="rect">
+            <a:avLst/>
+          </a:prstGeom>
+          <a:noFill/>
+        </p:spPr>
+        <p:txBody>
+          <a:bodyPr wrap="square">
+            <a:spAutoFit/>
+          </a:bodyPr>
+          <a:lstStyle/>
+          <a:p>
+            <a:pPr>
+              <a:spcAft>
+                <a:spcPts val="600"/>
+              </a:spcAft>
+            </a:pPr>
+            <a:r>
+              <a:rPr sz="1500">
+                <a:solidFill>
+                  <a:srgbClr val="22282E"/>
+                </a:solidFill>
+              </a:rPr>
               <a:t>•  RFC 9110, HTTP Semantics — &lt;https://www.rfc-editor.org/rfc/rfc9110&gt;</a:t>
             </a:r>
           </a:p>
@@ -3534,6 +3835,21 @@
                   <a:srgbClr val="22282E"/>
                 </a:solidFill>
               </a:rPr>
+              <a:t>•  RFC 6265, HTTP State Management Mechanism (Cookies) — &lt;https://www.rfc-editor.org/rfc/rfc6265&gt;</a:t>
+            </a:r>
+          </a:p>
+          <a:p>
+            <a:pPr>
+              <a:spcAft>
+                <a:spcPts val="600"/>
+              </a:spcAft>
+            </a:pPr>
+            <a:r>
+              <a:rPr sz="1500">
+                <a:solidFill>
+                  <a:srgbClr val="22282E"/>
+                </a:solidFill>
+              </a:rPr>
               <a:t>•  MDN Web Docs: HTTP — &lt;https://developer.mozilla.org/docs/Web/HTTP&gt;</a:t>
             </a:r>
           </a:p>
@@ -3569,6 +3885,81 @@
           </a:p>
         </p:txBody>
       </p:sp>
+    </p:spTree>
+  </p:cSld>
+  <p:clrMapOvr>
+    <a:masterClrMapping/>
+  </p:clrMapOvr>
+</p:sld>
+</file>
+
+<file path=ppt/slides/slide15.xml><?xml version="1.0" encoding="utf-8"?>
+<p:sld xmlns:a="http://schemas.openxmlformats.org/drawingml/2006/main" xmlns:p="http://schemas.openxmlformats.org/presentationml/2006/main" xmlns:r="http://schemas.openxmlformats.org/officeDocument/2006/relationships">
+  <p:cSld>
+    <p:spTree>
+      <p:nvGrpSpPr>
+        <p:cNvPr id="1" name=""/>
+        <p:cNvGrpSpPr/>
+        <p:nvPr/>
+      </p:nvGrpSpPr>
+      <p:grpSpPr/>
+      <p:sp>
+        <p:nvSpPr>
+          <p:cNvPr id="2" name="TextBox 1"/>
+          <p:cNvSpPr txBox="1"/>
+          <p:nvPr/>
+        </p:nvSpPr>
+        <p:spPr>
+          <a:xfrm>
+            <a:off x="457200" y="274320"/>
+            <a:ext cx="8229600" cy="640080"/>
+          </a:xfrm>
+          <a:prstGeom prst="rect">
+            <a:avLst/>
+          </a:prstGeom>
+          <a:noFill/>
+        </p:spPr>
+        <p:txBody>
+          <a:bodyPr wrap="square">
+            <a:spAutoFit/>
+          </a:bodyPr>
+          <a:lstStyle/>
+          <a:p>
+            <a:r>
+              <a:rPr sz="2200" b="1">
+                <a:solidFill>
+                  <a:srgbClr val="0B3D2E"/>
+                </a:solidFill>
+              </a:rPr>
+              <a:t>Diagrama de la clase</a:t>
+            </a:r>
+          </a:p>
+        </p:txBody>
+      </p:sp>
+      <p:pic>
+        <p:nvPicPr>
+          <p:cNvPr id="3" name="Picture 2" descr="544e5406cfc67b57.png"/>
+          <p:cNvPicPr>
+            <a:picLocks noChangeAspect="1"/>
+          </p:cNvPicPr>
+          <p:nvPr/>
+        </p:nvPicPr>
+        <p:blipFill>
+          <a:blip r:embed="rId2"/>
+          <a:stretch>
+            <a:fillRect/>
+          </a:stretch>
+        </p:blipFill>
+        <p:spPr>
+          <a:xfrm>
+            <a:off x="713232" y="1097280"/>
+            <a:ext cx="7717536" cy="5303520"/>
+          </a:xfrm>
+          <a:prstGeom prst="rect">
+            <a:avLst/>
+          </a:prstGeom>
+        </p:spPr>
+      </p:pic>
     </p:spTree>
   </p:cSld>
   <p:clrMapOvr>
@@ -3653,7 +4044,7 @@
                   <a:srgbClr val="22282E"/>
                 </a:solidFill>
               </a:rPr>
-              <a:t>•  Dominar el protocolo sobre el que corre la web y, con él, la mayor parte de la superficie de ataque moderna. Al terminar entenderás peticiones y respuestas HTTP, métodos, códigos de estado, cabeceras, cookies y sesiones, y cómo HTTPS/TLS añade confidencialidad e integridad al canal.</a:t>
+              <a:t>•  Dominar el protocolo sobre el que corre la web y, con él, la mayor parte de la superficie de ataque moderna. Al terminar entenderás la anatomía de peticiones y respuestas HTTP, la semántica de…</a:t>
             </a:r>
           </a:p>
         </p:txBody>
@@ -3757,37 +4148,37 @@
                   <a:srgbClr val="22282E"/>
                 </a:solidFill>
               </a:rPr>
-              <a:t>•  Construir e interpretar peticiones y respuestas HTTP.</a:t>
-            </a:r>
-          </a:p>
-          <a:p>
-            <a:pPr>
-              <a:spcAft>
-                <a:spcPts val="600"/>
-              </a:spcAft>
-            </a:pPr>
-            <a:r>
-              <a:rPr sz="1500">
-                <a:solidFill>
-                  <a:srgbClr val="22282E"/>
-                </a:solidFill>
-              </a:rPr>
-              <a:t>•  Explicar métodos, códigos de estado y cabeceras relevantes.</a:t>
-            </a:r>
-          </a:p>
-          <a:p>
-            <a:pPr>
-              <a:spcAft>
-                <a:spcPts val="600"/>
-              </a:spcAft>
-            </a:pPr>
-            <a:r>
-              <a:rPr sz="1500">
-                <a:solidFill>
-                  <a:srgbClr val="22282E"/>
-                </a:solidFill>
-              </a:rPr>
-              <a:t>•  Describir cómo funcionan cookies, sesiones y autenticación web.</a:t>
+              <a:t>•  Construir e interpretar peticiones y respuestas HTTP crudas.</a:t>
+            </a:r>
+          </a:p>
+          <a:p>
+            <a:pPr>
+              <a:spcAft>
+                <a:spcPts val="600"/>
+              </a:spcAft>
+            </a:pPr>
+            <a:r>
+              <a:rPr sz="1500">
+                <a:solidFill>
+                  <a:srgbClr val="22282E"/>
+                </a:solidFill>
+              </a:rPr>
+              <a:t>•  Explicar la semántica de métodos, códigos de estado y cabeceras relevantes.</a:t>
+            </a:r>
+          </a:p>
+          <a:p>
+            <a:pPr>
+              <a:spcAft>
+                <a:spcPts val="600"/>
+              </a:spcAft>
+            </a:pPr>
+            <a:r>
+              <a:rPr sz="1500">
+                <a:solidFill>
+                  <a:srgbClr val="22282E"/>
+                </a:solidFill>
+              </a:rPr>
+              <a:t>•  Describir cómo funcionan cookies, sesiones y la autenticación web.</a:t>
             </a:r>
           </a:p>
           <a:p>
@@ -3817,7 +4208,22 @@
                   <a:srgbClr val="22282E"/>
                 </a:solidFill>
               </a:rPr>
-              <a:t>•  Analizar tráfico web con herramientas de interceptación.</a:t>
+              <a:t>•  Analizar tráfico web con herramientas de interceptación como Burp o ZAP.</a:t>
+            </a:r>
+          </a:p>
+          <a:p>
+            <a:pPr>
+              <a:spcAft>
+                <a:spcPts val="600"/>
+              </a:spcAft>
+            </a:pPr>
+            <a:r>
+              <a:rPr sz="1500">
+                <a:solidFill>
+                  <a:srgbClr val="22282E"/>
+                </a:solidFill>
+              </a:rPr>
+              <a:t>•  Evaluar la postura de seguridad de un sitio a partir de sus cabeceras.</a:t>
             </a:r>
           </a:p>
         </p:txBody>
@@ -4047,7 +4453,7 @@
                   <a:srgbClr val="0B3D2E"/>
                 </a:solidFill>
               </a:rPr>
-              <a:t>📖 Definiciones y características</a:t>
+              <a:t>🧠 Explicación en profundidad</a:t>
             </a:r>
           </a:p>
         </p:txBody>
@@ -4085,82 +4491,97 @@
                   <a:srgbClr val="22282E"/>
                 </a:solidFill>
               </a:rPr>
-              <a:t>•  HTTP: protocolo de aplicación sin estado sobre TCP (o QUIC en HTTP/3). Clave: cada petición es independiente; el estado se añade con cookies.</a:t>
-            </a:r>
-          </a:p>
-          <a:p>
-            <a:pPr>
-              <a:spcAft>
-                <a:spcPts val="600"/>
-              </a:spcAft>
-            </a:pPr>
-            <a:r>
-              <a:rPr sz="1500">
-                <a:solidFill>
-                  <a:srgbClr val="22282E"/>
-                </a:solidFill>
-              </a:rPr>
-              <a:t>•  Método: verbo que indica la acción (GET lee, POST envía, PUT reemplaza, DELETE borra). Clave: GET debe ser seguro/idempotente.</a:t>
-            </a:r>
-          </a:p>
-          <a:p>
-            <a:pPr>
-              <a:spcAft>
-                <a:spcPts val="600"/>
-              </a:spcAft>
-            </a:pPr>
-            <a:r>
-              <a:rPr sz="1500">
-                <a:solidFill>
-                  <a:srgbClr val="22282E"/>
-                </a:solidFill>
-              </a:rPr>
-              <a:t>•  Código de estado: número de la respuesta (200 OK, 301 redirección, 401/403 auth, 404, 500). Clave: primer diagnóstico de cualquier fallo web.</a:t>
-            </a:r>
-          </a:p>
-          <a:p>
-            <a:pPr>
-              <a:spcAft>
-                <a:spcPts val="600"/>
-              </a:spcAft>
-            </a:pPr>
-            <a:r>
-              <a:rPr sz="1500">
-                <a:solidFill>
-                  <a:srgbClr val="22282E"/>
-                </a:solidFill>
-              </a:rPr>
-              <a:t>•  Cookie: dato que el servidor pide al navegador guardar y reenviar. Clave: HttpOnly, Secure, SameSite la protegen.</a:t>
-            </a:r>
-          </a:p>
-          <a:p>
-            <a:pPr>
-              <a:spcAft>
-                <a:spcPts val="600"/>
-              </a:spcAft>
-            </a:pPr>
-            <a:r>
-              <a:rPr sz="1500">
-                <a:solidFill>
-                  <a:srgbClr val="22282E"/>
-                </a:solidFill>
-              </a:rPr>
-              <a:t>•  TLS: protocolo que cifra y autentica el canal mediante certificados. Clave: HTTPS = HTTP sobre TLS; protege confidencialidad e integridad, no la app.</a:t>
-            </a:r>
-          </a:p>
-          <a:p>
-            <a:pPr>
-              <a:spcAft>
-                <a:spcPts val="600"/>
-              </a:spcAft>
-            </a:pPr>
-            <a:r>
-              <a:rPr sz="1500">
-                <a:solidFill>
-                  <a:srgbClr val="22282E"/>
-                </a:solidFill>
-              </a:rPr>
-              <a:t>•  HSTS: cabecera que fuerza HTTPS en el navegador. Clave: mitiga el downgrade a HTTP.</a:t>
+              <a:t>•  HTTP es, en su forma clásica (HTTP/1.1), un protocolo de texto sorprendentemente legible. El cliente abre una conexión TCP y envía una petición con tres partes: una línea inicial (método, ruta y…</a:t>
+            </a:r>
+          </a:p>
+          <a:p>
+            <a:pPr>
+              <a:spcAft>
+                <a:spcPts val="600"/>
+              </a:spcAft>
+            </a:pPr>
+            <a:r>
+              <a:rPr sz="1500">
+                <a:solidFill>
+                  <a:srgbClr val="22282E"/>
+                </a:solidFill>
+              </a:rPr>
+              <a:t>•  Los métodos son verbos que declaran la intención de la petición. GET recupera un recurso y debe ser seguro (no modifica estado) e idempotente (repetirlo no cambia nada); POST envía datos y puede…</a:t>
+            </a:r>
+          </a:p>
+          <a:p>
+            <a:pPr>
+              <a:spcAft>
+                <a:spcPts val="600"/>
+              </a:spcAft>
+            </a:pPr>
+            <a:r>
+              <a:rPr sz="1500">
+                <a:solidFill>
+                  <a:srgbClr val="22282E"/>
+                </a:solidFill>
+              </a:rPr>
+              <a:t>•  Los códigos de estado son el primer diagnóstico de cualquier interacción, agrupados por su primer dígito. La siguiente tabla condensa la lógica de cada familia.</a:t>
+            </a:r>
+          </a:p>
+          <a:p>
+            <a:pPr>
+              <a:spcAft>
+                <a:spcPts val="600"/>
+              </a:spcAft>
+            </a:pPr>
+            <a:r>
+              <a:rPr sz="1500">
+                <a:solidFill>
+                  <a:srgbClr val="22282E"/>
+                </a:solidFill>
+              </a:rPr>
+              <a:t>•  Familia — Significado</a:t>
+            </a:r>
+          </a:p>
+          <a:p>
+            <a:pPr>
+              <a:spcAft>
+                <a:spcPts val="600"/>
+              </a:spcAft>
+            </a:pPr>
+            <a:r>
+              <a:rPr sz="1500">
+                <a:solidFill>
+                  <a:srgbClr val="22282E"/>
+                </a:solidFill>
+              </a:rPr>
+              <a:t>•  2xx — Éxito</a:t>
+            </a:r>
+          </a:p>
+          <a:p>
+            <a:pPr>
+              <a:spcAft>
+                <a:spcPts val="600"/>
+              </a:spcAft>
+            </a:pPr>
+            <a:r>
+              <a:rPr sz="1500">
+                <a:solidFill>
+                  <a:srgbClr val="22282E"/>
+                </a:solidFill>
+              </a:rPr>
+              <a:t>•  3xx — Redirección</a:t>
+            </a:r>
+          </a:p>
+          <a:p>
+            <a:pPr>
+              <a:spcAft>
+                <a:spcPts val="600"/>
+              </a:spcAft>
+            </a:pPr>
+            <a:r>
+              <a:rPr sz="1500">
+                <a:solidFill>
+                  <a:srgbClr val="22282E"/>
+                </a:solidFill>
+              </a:rPr>
+              <a:t>•  4xx — Error del cliente</a:t>
             </a:r>
           </a:p>
         </p:txBody>
@@ -4211,7 +4632,7 @@
                   <a:srgbClr val="0B3D2E"/>
                 </a:solidFill>
               </a:rPr>
-              <a:t>🧰 Herramientas y preparación</a:t>
+              <a:t>📖 Definiciones y características</a:t>
             </a:r>
           </a:p>
         </p:txBody>
@@ -4249,7 +4670,97 @@
                   <a:srgbClr val="22282E"/>
                 </a:solidFill>
               </a:rPr>
-              <a:t>•  Usa curl, el navegador con sus DevTools (pestaña Network), y un proxy de interceptación como Burp Suite Community o OWASP ZAP. Para inspeccionar TLS, openssl sclient. Practica contra una app de laboratorio (DVWA, o un servidor propio), nunca contra sitios ajenos sin permiso.</a:t>
+              <a:t>•  HTTP: protocolo de aplicación sin estado que corre sobre TCP (o sobre QUIC en HTTP/3). Cada petición es independiente; el estado se añade artificialmente con cookies y tokens.</a:t>
+            </a:r>
+          </a:p>
+          <a:p>
+            <a:pPr>
+              <a:spcAft>
+                <a:spcPts val="600"/>
+              </a:spcAft>
+            </a:pPr>
+            <a:r>
+              <a:rPr sz="1500">
+                <a:solidFill>
+                  <a:srgbClr val="22282E"/>
+                </a:solidFill>
+              </a:rPr>
+              <a:t>•  Método HTTP: verbo que declara la intención (GET lee, POST envía, PUT reemplaza, DELETE borra). GET debe ser seguro e idempotente, y violar esa semántica genera fallos reales de caché y crawling.</a:t>
+            </a:r>
+          </a:p>
+          <a:p>
+            <a:pPr>
+              <a:spcAft>
+                <a:spcPts val="600"/>
+              </a:spcAft>
+            </a:pPr>
+            <a:r>
+              <a:rPr sz="1500">
+                <a:solidFill>
+                  <a:srgbClr val="22282E"/>
+                </a:solidFill>
+              </a:rPr>
+              <a:t>•  Código de estado: número de tres dígitos que resume el resultado de la petición, agrupado en familias 2xx/3xx/4xx/5xx. Es el primer diagnóstico de cualquier fallo web.</a:t>
+            </a:r>
+          </a:p>
+          <a:p>
+            <a:pPr>
+              <a:spcAft>
+                <a:spcPts val="600"/>
+              </a:spcAft>
+            </a:pPr>
+            <a:r>
+              <a:rPr sz="1500">
+                <a:solidFill>
+                  <a:srgbClr val="22282E"/>
+                </a:solidFill>
+              </a:rPr>
+              <a:t>•  Cookie: dato que el servidor pide al navegador almacenar y reenviar. Sus atributos HttpOnly, Secure y SameSite determinan su resistencia a XSS, captura en claro y CSRF.</a:t>
+            </a:r>
+          </a:p>
+          <a:p>
+            <a:pPr>
+              <a:spcAft>
+                <a:spcPts val="600"/>
+              </a:spcAft>
+            </a:pPr>
+            <a:r>
+              <a:rPr sz="1500">
+                <a:solidFill>
+                  <a:srgbClr val="22282E"/>
+                </a:solidFill>
+              </a:rPr>
+              <a:t>•  Sesión: mecanismo por el que el servidor asocia peticiones al mismo usuario, normalmente mediante un identificador guardado en cookie. Es el objetivo del secuestro de sesión.</a:t>
+            </a:r>
+          </a:p>
+          <a:p>
+            <a:pPr>
+              <a:spcAft>
+                <a:spcPts val="600"/>
+              </a:spcAft>
+            </a:pPr>
+            <a:r>
+              <a:rPr sz="1500">
+                <a:solidFill>
+                  <a:srgbClr val="22282E"/>
+                </a:solidFill>
+              </a:rPr>
+              <a:t>•  TLS: protocolo que cifra y autentica el canal mediante certificados. Aporta confidencialidad, integridad y autenticación, pero no protege contra fallos de la aplicación.</a:t>
+            </a:r>
+          </a:p>
+          <a:p>
+            <a:pPr>
+              <a:spcAft>
+                <a:spcPts val="600"/>
+              </a:spcAft>
+            </a:pPr>
+            <a:r>
+              <a:rPr sz="1500">
+                <a:solidFill>
+                  <a:srgbClr val="22282E"/>
+                </a:solidFill>
+              </a:rPr>
+              <a:t>•  HSTS: cabecera que obliga al navegador a usar HTTPS con un dominio, mitigando los ataques de downgrade a HTTP.</a:t>
             </a:r>
           </a:p>
         </p:txBody>
@@ -4300,7 +4811,7 @@
                   <a:srgbClr val="0B3D2E"/>
                 </a:solidFill>
               </a:rPr>
-              <a:t>🧪 Laboratorio guiado</a:t>
+              <a:t>📔 Glosario</a:t>
             </a:r>
           </a:p>
         </p:txBody>
@@ -4338,97 +4849,97 @@
                   <a:srgbClr val="22282E"/>
                 </a:solidFill>
               </a:rPr>
-              <a:t>•  Petición cruda con curl. Observa cabeceras de respuesta:</a:t>
-            </a:r>
-          </a:p>
-          <a:p>
-            <a:pPr>
-              <a:spcAft>
-                <a:spcPts val="600"/>
-              </a:spcAft>
-            </a:pPr>
-            <a:r>
-              <a:rPr sz="1500">
-                <a:solidFill>
-                  <a:srgbClr val="22282E"/>
-                </a:solidFill>
-              </a:rPr>
-              <a:t>•  curl -v http://10.10.10.6/ 2&gt;&amp;1 | head -40</a:t>
-            </a:r>
-          </a:p>
-          <a:p>
-            <a:pPr>
-              <a:spcAft>
-                <a:spcPts val="600"/>
-              </a:spcAft>
-            </a:pPr>
-            <a:r>
-              <a:rPr sz="1500">
-                <a:solidFill>
-                  <a:srgbClr val="22282E"/>
-                </a:solidFill>
-              </a:rPr>
-              <a:t>•  Identifica la línea de estado, cabeceras y cuerpo.</a:t>
-            </a:r>
-          </a:p>
-          <a:p>
-            <a:pPr>
-              <a:spcAft>
-                <a:spcPts val="600"/>
-              </a:spcAft>
-            </a:pPr>
-            <a:r>
-              <a:rPr sz="1500">
-                <a:solidFill>
-                  <a:srgbClr val="22282E"/>
-                </a:solidFill>
-              </a:rPr>
-              <a:t>•  Métodos y estados. Prueba distintos métodos y observa el código:</a:t>
-            </a:r>
-          </a:p>
-          <a:p>
-            <a:pPr>
-              <a:spcAft>
-                <a:spcPts val="600"/>
-              </a:spcAft>
-            </a:pPr>
-            <a:r>
-              <a:rPr sz="1500">
-                <a:solidFill>
-                  <a:srgbClr val="22282E"/>
-                </a:solidFill>
-              </a:rPr>
-              <a:t>•  curl -s -o /dev/null -w "%{httpcode}\n" -X POST http://10.10.10.6/login</a:t>
-            </a:r>
-          </a:p>
-          <a:p>
-            <a:pPr>
-              <a:spcAft>
-                <a:spcPts val="600"/>
-              </a:spcAft>
-            </a:pPr>
-            <a:r>
-              <a:rPr sz="1500">
-                <a:solidFill>
-                  <a:srgbClr val="22282E"/>
-                </a:solidFill>
-              </a:rPr>
-              <a:t>•  Inspeccionar cookies. Haz login en la app de laboratorio con DevTools abiertas y revisa la cookie de sesión: ¿tiene HttpOnly, Secure, SameSite?</a:t>
-            </a:r>
-          </a:p>
-          <a:p>
-            <a:pPr>
-              <a:spcAft>
-                <a:spcPts val="600"/>
-              </a:spcAft>
-            </a:pPr>
-            <a:r>
-              <a:rPr sz="1500">
-                <a:solidFill>
-                  <a:srgbClr val="22282E"/>
-                </a:solidFill>
-              </a:rPr>
-              <a:t>•  Interceptar con Burp/ZAP. Configura el navegador para pasar por el proxy y captura una petición; modifícala y reenvíala (Repeater) para ver el efecto en el servidor.</a:t>
+              <a:t>•  Término — Definición concisa</a:t>
+            </a:r>
+          </a:p>
+          <a:p>
+            <a:pPr>
+              <a:spcAft>
+                <a:spcPts val="600"/>
+              </a:spcAft>
+            </a:pPr>
+            <a:r>
+              <a:rPr sz="1500">
+                <a:solidFill>
+                  <a:srgbClr val="22282E"/>
+                </a:solidFill>
+              </a:rPr>
+              <a:t>•  HTTP — Protocolo de aplicación sin estado para transferir recursos web.</a:t>
+            </a:r>
+          </a:p>
+          <a:p>
+            <a:pPr>
+              <a:spcAft>
+                <a:spcPts val="600"/>
+              </a:spcAft>
+            </a:pPr>
+            <a:r>
+              <a:rPr sz="1500">
+                <a:solidFill>
+                  <a:srgbClr val="22282E"/>
+                </a:solidFill>
+              </a:rPr>
+              <a:t>•  HTTPS — HTTP transportado sobre TLS: canal cifrado y autenticado.</a:t>
+            </a:r>
+          </a:p>
+          <a:p>
+            <a:pPr>
+              <a:spcAft>
+                <a:spcPts val="600"/>
+              </a:spcAft>
+            </a:pPr>
+            <a:r>
+              <a:rPr sz="1500">
+                <a:solidFill>
+                  <a:srgbClr val="22282E"/>
+                </a:solidFill>
+              </a:rPr>
+              <a:t>•  TLS — Protocolo que cifra, autentica y protege la integridad del canal.</a:t>
+            </a:r>
+          </a:p>
+          <a:p>
+            <a:pPr>
+              <a:spcAft>
+                <a:spcPts val="600"/>
+              </a:spcAft>
+            </a:pPr>
+            <a:r>
+              <a:rPr sz="1500">
+                <a:solidFill>
+                  <a:srgbClr val="22282E"/>
+                </a:solidFill>
+              </a:rPr>
+              <a:t>•  Método — Verbo HTTP que declara la acción sobre un recurso.</a:t>
+            </a:r>
+          </a:p>
+          <a:p>
+            <a:pPr>
+              <a:spcAft>
+                <a:spcPts val="600"/>
+              </a:spcAft>
+            </a:pPr>
+            <a:r>
+              <a:rPr sz="1500">
+                <a:solidFill>
+                  <a:srgbClr val="22282E"/>
+                </a:solidFill>
+              </a:rPr>
+              <a:t>•  Idempotente — Operación que repetida produce el mismo efecto que una sola vez.</a:t>
+            </a:r>
+          </a:p>
+          <a:p>
+            <a:pPr>
+              <a:spcAft>
+                <a:spcPts val="600"/>
+              </a:spcAft>
+            </a:pPr>
+            <a:r>
+              <a:rPr sz="1500">
+                <a:solidFill>
+                  <a:srgbClr val="22282E"/>
+                </a:solidFill>
+              </a:rPr>
+              <a:t>•  Código de estado — Número que resume el resultado de una respuesta HTTP.</a:t>
             </a:r>
           </a:p>
         </p:txBody>
@@ -4479,7 +4990,7 @@
                   <a:srgbClr val="0B3D2E"/>
                 </a:solidFill>
               </a:rPr>
-              <a:t>✍️ Ejercicios</a:t>
+              <a:t>🧰 Herramientas y preparación</a:t>
             </a:r>
           </a:p>
         </p:txBody>
@@ -4517,82 +5028,7 @@
                   <a:srgbClr val="22282E"/>
                 </a:solidFill>
               </a:rPr>
-              <a:t>•  Clasifica estos códigos: 204, 301, 401, 403, 429, 502. ¿Qué significa cada uno?</a:t>
-            </a:r>
-          </a:p>
-          <a:p>
-            <a:pPr>
-              <a:spcAft>
-                <a:spcPts val="600"/>
-              </a:spcAft>
-            </a:pPr>
-            <a:r>
-              <a:rPr sz="1500">
-                <a:solidFill>
-                  <a:srgbClr val="22282E"/>
-                </a:solidFill>
-              </a:rPr>
-              <a:t>•  Explica la diferencia entre 401 y 403.</a:t>
-            </a:r>
-          </a:p>
-          <a:p>
-            <a:pPr>
-              <a:spcAft>
-                <a:spcPts val="600"/>
-              </a:spcAft>
-            </a:pPr>
-            <a:r>
-              <a:rPr sz="1500">
-                <a:solidFill>
-                  <a:srgbClr val="22282E"/>
-                </a:solidFill>
-              </a:rPr>
-              <a:t>•  ¿Qué atributos hacen segura una cookie de sesión y contra qué protege cada uno?</a:t>
-            </a:r>
-          </a:p>
-          <a:p>
-            <a:pPr>
-              <a:spcAft>
-                <a:spcPts val="600"/>
-              </a:spcAft>
-            </a:pPr>
-            <a:r>
-              <a:rPr sz="1500">
-                <a:solidFill>
-                  <a:srgbClr val="22282E"/>
-                </a:solidFill>
-              </a:rPr>
-              <a:t>•  Describe qué información revela y qué oculta TLS a un observador de la red.</a:t>
-            </a:r>
-          </a:p>
-          <a:p>
-            <a:pPr>
-              <a:spcAft>
-                <a:spcPts val="600"/>
-              </a:spcAft>
-            </a:pPr>
-            <a:r>
-              <a:rPr sz="1500">
-                <a:solidFill>
-                  <a:srgbClr val="22282E"/>
-                </a:solidFill>
-              </a:rPr>
-              <a:t>•  Investiga la cabecera Content-Security-Policy y da un ejemplo que mitigue XSS.</a:t>
-            </a:r>
-          </a:p>
-          <a:p>
-            <a:pPr>
-              <a:spcAft>
-                <a:spcPts val="600"/>
-              </a:spcAft>
-            </a:pPr>
-            <a:r>
-              <a:rPr sz="1500">
-                <a:solidFill>
-                  <a:srgbClr val="22282E"/>
-                </a:solidFill>
-              </a:rPr>
-              <a:t>•  Con Burp Repeater, cambia un parámetro y documenta cómo responde la app.</a:t>
+              <a:t>•  Usa curl para lanzar peticiones crudas y leer cabeceras, el navegador con sus DevTools (pestaña Network) para inspeccionar tráfico real, y un proxy de interceptación como Burp Suite Community o OWASP…</a:t>
             </a:r>
           </a:p>
         </p:txBody>
@@ -4643,7 +5079,7 @@
                   <a:srgbClr val="0B3D2E"/>
                 </a:solidFill>
               </a:rPr>
-              <a:t>📝 Reto verificable</a:t>
+              <a:t>🧪 Laboratorio guiado</a:t>
             </a:r>
           </a:p>
         </p:txBody>
@@ -4681,22 +5117,82 @@
                   <a:srgbClr val="22282E"/>
                 </a:solidFill>
               </a:rPr>
-              <a:t>•  Usando un proxy de interceptación, captura el flujo completo de autenticación de una app de laboratorio: la petición de login, la respuesta que establece la cookie de sesión, y una petición autenticada posterior. Documenta las cabeceras de seguridad presentes y ausentes, y propón mejoras.</a:t>
-            </a:r>
-          </a:p>
-          <a:p>
-            <a:pPr>
-              <a:spcAft>
-                <a:spcPts val="600"/>
-              </a:spcAft>
-            </a:pPr>
-            <a:r>
-              <a:rPr sz="1500">
-                <a:solidFill>
-                  <a:srgbClr val="22282E"/>
-                </a:solidFill>
-              </a:rPr>
-              <a:t>•  Criterio de aceptación: la evidencia muestra la cookie de sesión con sus atributos reales, e identificas correctamente al menos dos cabeceras de seguridad faltantes (p. ej. HSTS, CSP, SameSite) con una recomendación concreta por cada una. Reproducible contra la misma app.</a:t>
+              <a:t>•  Petición cruda con curl. Observa la línea de estado, las cabeceras y el cuerpo:</a:t>
+            </a:r>
+          </a:p>
+          <a:p>
+            <a:pPr>
+              <a:spcAft>
+                <a:spcPts val="600"/>
+              </a:spcAft>
+            </a:pPr>
+            <a:r>
+              <a:rPr sz="1500">
+                <a:solidFill>
+                  <a:srgbClr val="22282E"/>
+                </a:solidFill>
+              </a:rPr>
+              <a:t>•  Métodos y estados. Prueba distintos métodos y observa solo el código de estado:</a:t>
+            </a:r>
+          </a:p>
+          <a:p>
+            <a:pPr>
+              <a:spcAft>
+                <a:spcPts val="600"/>
+              </a:spcAft>
+            </a:pPr>
+            <a:r>
+              <a:rPr sz="1500">
+                <a:solidFill>
+                  <a:srgbClr val="22282E"/>
+                </a:solidFill>
+              </a:rPr>
+              <a:t>•  Inspeccionar cookies. Haz login en la app de laboratorio con las DevTools abiertas y revisa la cookie de sesión: ¿tiene HttpOnly, Secure y SameSite?</a:t>
+            </a:r>
+          </a:p>
+          <a:p>
+            <a:pPr>
+              <a:spcAft>
+                <a:spcPts val="600"/>
+              </a:spcAft>
+            </a:pPr>
+            <a:r>
+              <a:rPr sz="1500">
+                <a:solidFill>
+                  <a:srgbClr val="22282E"/>
+                </a:solidFill>
+              </a:rPr>
+              <a:t>•  Interceptar con Burp o ZAP. Configura el navegador para pasar por el proxy, captura una petición, modifícala y reenvíala (Repeater) para observar el efecto en el servidor.</a:t>
+            </a:r>
+          </a:p>
+          <a:p>
+            <a:pPr>
+              <a:spcAft>
+                <a:spcPts val="600"/>
+              </a:spcAft>
+            </a:pPr>
+            <a:r>
+              <a:rPr sz="1500">
+                <a:solidFill>
+                  <a:srgbClr val="22282E"/>
+                </a:solidFill>
+              </a:rPr>
+              <a:t>•  Examinar TLS. Lee el emisor y la validez del certificado:</a:t>
+            </a:r>
+          </a:p>
+          <a:p>
+            <a:pPr>
+              <a:spcAft>
+                <a:spcPts val="600"/>
+              </a:spcAft>
+            </a:pPr>
+            <a:r>
+              <a:rPr sz="1500">
+                <a:solidFill>
+                  <a:srgbClr val="22282E"/>
+                </a:solidFill>
+              </a:rPr>
+              <a:t>•  Cabeceras de seguridad. Comprueba si un sitio envía HSTS o CSP:</a:t>
             </a:r>
           </a:p>
         </p:txBody>
